--- a/rigkit-talk.pptx
+++ b/rigkit-talk.pptx
@@ -1359,9 +1359,9 @@
                 <a:solidFill>
                   <a:srgbClr val="FFFFFF"/>
                 </a:solidFill>
-                <a:latin typeface="Consolas" pitchFamily="34" charset="0"/>
-                <a:ea typeface="Consolas" pitchFamily="34" charset="-122"/>
-                <a:cs typeface="Consolas" pitchFamily="34" charset="-120"/>
+                <a:latin typeface="Arial" pitchFamily="34" charset="0"/>
+                <a:ea typeface="Arial" pitchFamily="34" charset="-122"/>
+                <a:cs typeface="Arial" pitchFamily="34" charset="-120"/>
               </a:rPr>
               <a:t>rigkit.freestyle.sh</a:t>
             </a:r>
@@ -1409,8 +1409,8 @@
         </p:nvSpPr>
         <p:spPr>
           <a:xfrm>
-            <a:off x="640080" y="640080"/>
-            <a:ext cx="10881360" cy="457200"/>
+            <a:off x="914400" y="1920240"/>
+            <a:ext cx="10332720" cy="914400"/>
           </a:xfrm>
           <a:prstGeom prst="rect">
             <a:avLst/>
@@ -1423,328 +1423,13 @@
           <a:lstStyle/>
           <a:p>
             <a:pPr algn="ctr" indent="0" marL="0">
+              <a:lnSpc>
+                <a:spcPct val="125000"/>
+              </a:lnSpc>
               <a:buNone/>
             </a:pPr>
             <a:r>
-              <a:rPr lang="en-US" sz="2200" i="1" dirty="0">
-                <a:solidFill>
-                  <a:srgbClr val="737373"/>
-                </a:solidFill>
-                <a:latin typeface="Arial" pitchFamily="34" charset="0"/>
-                <a:ea typeface="Arial" pitchFamily="34" charset="-122"/>
-                <a:cs typeface="Arial" pitchFamily="34" charset="-120"/>
-              </a:rPr>
-              <a:t>we're building frameworks for these</a:t>
-            </a:r>
-            <a:endParaRPr lang="en-US" sz="2200" dirty="0"/>
-          </a:p>
-        </p:txBody>
-      </p:sp>
-      <p:sp>
-        <p:nvSpPr>
-          <p:cNvPr id="3" name="Shape 1"/>
-          <p:cNvSpPr/>
-          <p:nvPr/>
-        </p:nvSpPr>
-        <p:spPr>
-          <a:xfrm>
-            <a:off x="1280160" y="1417320"/>
-            <a:ext cx="2194560" cy="1005840"/>
-          </a:xfrm>
-          <a:prstGeom prst="rect">
-            <a:avLst/>
-          </a:prstGeom>
-          <a:solidFill>
-            <a:srgbClr val="FFFFFF"/>
-          </a:solidFill>
-          <a:ln w="12700">
-            <a:solidFill>
-              <a:srgbClr val="E5E5E5"/>
-            </a:solidFill>
-            <a:prstDash val="solid"/>
-          </a:ln>
-        </p:spPr>
-      </p:sp>
-      <p:sp>
-        <p:nvSpPr>
-          <p:cNvPr id="4" name="Text 2"/>
-          <p:cNvSpPr/>
-          <p:nvPr/>
-        </p:nvSpPr>
-        <p:spPr>
-          <a:xfrm>
-            <a:off x="1463040" y="1417320"/>
-            <a:ext cx="1828800" cy="1005840"/>
-          </a:xfrm>
-          <a:prstGeom prst="rect">
-            <a:avLst/>
-          </a:prstGeom>
-          <a:noFill/>
-          <a:ln/>
-        </p:spPr>
-        <p:txBody>
-          <a:bodyPr wrap="square" lIns="0" tIns="0" rIns="0" bIns="0" rtlCol="0" anchor="ctr"/>
-          <a:lstStyle/>
-          <a:p>
-            <a:pPr algn="ctr" indent="0" marL="0">
-              <a:buNone/>
-            </a:pPr>
-            <a:r>
-              <a:rPr lang="en-US" sz="1800" b="1" dirty="0">
-                <a:solidFill>
-                  <a:srgbClr val="737373"/>
-                </a:solidFill>
-                <a:latin typeface="Arial Black" pitchFamily="34" charset="0"/>
-                <a:ea typeface="Arial Black" pitchFamily="34" charset="-122"/>
-                <a:cs typeface="Arial Black" pitchFamily="34" charset="-120"/>
-              </a:rPr>
-              <a:t>MCP</a:t>
-            </a:r>
-            <a:endParaRPr lang="en-US" sz="1800" dirty="0"/>
-          </a:p>
-        </p:txBody>
-      </p:sp>
-      <p:sp>
-        <p:nvSpPr>
-          <p:cNvPr id="5" name="Shape 3"/>
-          <p:cNvSpPr/>
-          <p:nvPr/>
-        </p:nvSpPr>
-        <p:spPr>
-          <a:xfrm>
-            <a:off x="3749040" y="1417320"/>
-            <a:ext cx="2194560" cy="1005840"/>
-          </a:xfrm>
-          <a:prstGeom prst="rect">
-            <a:avLst/>
-          </a:prstGeom>
-          <a:solidFill>
-            <a:srgbClr val="FFFFFF"/>
-          </a:solidFill>
-          <a:ln w="12700">
-            <a:solidFill>
-              <a:srgbClr val="E5E5E5"/>
-            </a:solidFill>
-            <a:prstDash val="solid"/>
-          </a:ln>
-        </p:spPr>
-      </p:sp>
-      <p:sp>
-        <p:nvSpPr>
-          <p:cNvPr id="6" name="Text 4"/>
-          <p:cNvSpPr/>
-          <p:nvPr/>
-        </p:nvSpPr>
-        <p:spPr>
-          <a:xfrm>
-            <a:off x="3931920" y="1417320"/>
-            <a:ext cx="1828800" cy="1005840"/>
-          </a:xfrm>
-          <a:prstGeom prst="rect">
-            <a:avLst/>
-          </a:prstGeom>
-          <a:noFill/>
-          <a:ln/>
-        </p:spPr>
-        <p:txBody>
-          <a:bodyPr wrap="square" lIns="0" tIns="0" rIns="0" bIns="0" rtlCol="0" anchor="ctr"/>
-          <a:lstStyle/>
-          <a:p>
-            <a:pPr algn="ctr" indent="0" marL="0">
-              <a:buNone/>
-            </a:pPr>
-            <a:r>
-              <a:rPr lang="en-US" sz="1800" b="1" dirty="0">
-                <a:solidFill>
-                  <a:srgbClr val="737373"/>
-                </a:solidFill>
-                <a:latin typeface="Arial Black" pitchFamily="34" charset="0"/>
-                <a:ea typeface="Arial Black" pitchFamily="34" charset="-122"/>
-                <a:cs typeface="Arial Black" pitchFamily="34" charset="-120"/>
-              </a:rPr>
-              <a:t>Tool calls</a:t>
-            </a:r>
-            <a:endParaRPr lang="en-US" sz="1800" dirty="0"/>
-          </a:p>
-        </p:txBody>
-      </p:sp>
-      <p:sp>
-        <p:nvSpPr>
-          <p:cNvPr id="7" name="Shape 5"/>
-          <p:cNvSpPr/>
-          <p:nvPr/>
-        </p:nvSpPr>
-        <p:spPr>
-          <a:xfrm>
-            <a:off x="6217920" y="1417320"/>
-            <a:ext cx="2194560" cy="1005840"/>
-          </a:xfrm>
-          <a:prstGeom prst="rect">
-            <a:avLst/>
-          </a:prstGeom>
-          <a:solidFill>
-            <a:srgbClr val="FFFFFF"/>
-          </a:solidFill>
-          <a:ln w="12700">
-            <a:solidFill>
-              <a:srgbClr val="E5E5E5"/>
-            </a:solidFill>
-            <a:prstDash val="solid"/>
-          </a:ln>
-        </p:spPr>
-      </p:sp>
-      <p:sp>
-        <p:nvSpPr>
-          <p:cNvPr id="8" name="Text 6"/>
-          <p:cNvSpPr/>
-          <p:nvPr/>
-        </p:nvSpPr>
-        <p:spPr>
-          <a:xfrm>
-            <a:off x="6400800" y="1417320"/>
-            <a:ext cx="1828800" cy="1005840"/>
-          </a:xfrm>
-          <a:prstGeom prst="rect">
-            <a:avLst/>
-          </a:prstGeom>
-          <a:noFill/>
-          <a:ln/>
-        </p:spPr>
-        <p:txBody>
-          <a:bodyPr wrap="square" lIns="0" tIns="0" rIns="0" bIns="0" rtlCol="0" anchor="ctr"/>
-          <a:lstStyle/>
-          <a:p>
-            <a:pPr algn="ctr" indent="0" marL="0">
-              <a:buNone/>
-            </a:pPr>
-            <a:r>
-              <a:rPr lang="en-US" sz="1800" b="1" dirty="0">
-                <a:solidFill>
-                  <a:srgbClr val="737373"/>
-                </a:solidFill>
-                <a:latin typeface="Arial Black" pitchFamily="34" charset="0"/>
-                <a:ea typeface="Arial Black" pitchFamily="34" charset="-122"/>
-                <a:cs typeface="Arial Black" pitchFamily="34" charset="-120"/>
-              </a:rPr>
-              <a:t>Virtual file systems</a:t>
-            </a:r>
-            <a:endParaRPr lang="en-US" sz="1800" dirty="0"/>
-          </a:p>
-        </p:txBody>
-      </p:sp>
-      <p:sp>
-        <p:nvSpPr>
-          <p:cNvPr id="9" name="Shape 7"/>
-          <p:cNvSpPr/>
-          <p:nvPr/>
-        </p:nvSpPr>
-        <p:spPr>
-          <a:xfrm>
-            <a:off x="8686800" y="1417320"/>
-            <a:ext cx="2194560" cy="1005840"/>
-          </a:xfrm>
-          <a:prstGeom prst="rect">
-            <a:avLst/>
-          </a:prstGeom>
-          <a:solidFill>
-            <a:srgbClr val="FFFFFF"/>
-          </a:solidFill>
-          <a:ln w="12700">
-            <a:solidFill>
-              <a:srgbClr val="E5E5E5"/>
-            </a:solidFill>
-            <a:prstDash val="solid"/>
-          </a:ln>
-        </p:spPr>
-      </p:sp>
-      <p:sp>
-        <p:nvSpPr>
-          <p:cNvPr id="10" name="Text 8"/>
-          <p:cNvSpPr/>
-          <p:nvPr/>
-        </p:nvSpPr>
-        <p:spPr>
-          <a:xfrm>
-            <a:off x="8869680" y="1417320"/>
-            <a:ext cx="1828800" cy="1005840"/>
-          </a:xfrm>
-          <a:prstGeom prst="rect">
-            <a:avLst/>
-          </a:prstGeom>
-          <a:noFill/>
-          <a:ln/>
-        </p:spPr>
-        <p:txBody>
-          <a:bodyPr wrap="square" lIns="0" tIns="0" rIns="0" bIns="0" rtlCol="0" anchor="ctr"/>
-          <a:lstStyle/>
-          <a:p>
-            <a:pPr algn="ctr" indent="0" marL="0">
-              <a:buNone/>
-            </a:pPr>
-            <a:r>
-              <a:rPr lang="en-US" sz="1800" b="1" dirty="0">
-                <a:solidFill>
-                  <a:srgbClr val="737373"/>
-                </a:solidFill>
-                <a:latin typeface="Arial Black" pitchFamily="34" charset="0"/>
-                <a:ea typeface="Arial Black" pitchFamily="34" charset="-122"/>
-                <a:cs typeface="Arial Black" pitchFamily="34" charset="-120"/>
-              </a:rPr>
-              <a:t>CLIs</a:t>
-            </a:r>
-            <a:endParaRPr lang="en-US" sz="1800" dirty="0"/>
-          </a:p>
-        </p:txBody>
-      </p:sp>
-      <p:sp>
-        <p:nvSpPr>
-          <p:cNvPr id="11" name="Shape 9"/>
-          <p:cNvSpPr/>
-          <p:nvPr/>
-        </p:nvSpPr>
-        <p:spPr>
-          <a:xfrm>
-            <a:off x="5623560" y="3108960"/>
-            <a:ext cx="914400" cy="0"/>
-          </a:xfrm>
-          <a:prstGeom prst="line">
-            <a:avLst/>
-          </a:prstGeom>
-          <a:noFill/>
-          <a:ln w="12700">
-            <a:solidFill>
-              <a:srgbClr val="E5E5E5"/>
-            </a:solidFill>
-            <a:prstDash val="solid"/>
-          </a:ln>
-        </p:spPr>
-      </p:sp>
-      <p:sp>
-        <p:nvSpPr>
-          <p:cNvPr id="12" name="Text 10"/>
-          <p:cNvSpPr/>
-          <p:nvPr/>
-        </p:nvSpPr>
-        <p:spPr>
-          <a:xfrm>
-            <a:off x="640080" y="3520440"/>
-            <a:ext cx="10881360" cy="502920"/>
-          </a:xfrm>
-          <a:prstGeom prst="rect">
-            <a:avLst/>
-          </a:prstGeom>
-          <a:noFill/>
-          <a:ln/>
-        </p:spPr>
-        <p:txBody>
-          <a:bodyPr wrap="square" lIns="0" tIns="0" rIns="0" bIns="0" rtlCol="0" anchor="ctr"/>
-          <a:lstStyle/>
-          <a:p>
-            <a:pPr algn="ctr" indent="0" marL="0">
-              <a:buNone/>
-            </a:pPr>
-            <a:r>
-              <a:rPr lang="en-US" sz="2400" i="1" dirty="0">
+              <a:rPr lang="en-US" sz="2600" i="1" dirty="0">
                 <a:solidFill>
                   <a:srgbClr val="0A0A0A"/>
                 </a:solidFill>
@@ -1752,101 +1437,63 @@
                 <a:ea typeface="Arial" pitchFamily="34" charset="-122"/>
                 <a:cs typeface="Arial" pitchFamily="34" charset="-120"/>
               </a:rPr>
-              <a:t>when we should be building frameworks for </a:t>
-            </a:r>
+              <a:t>there is a lot of work being done figuring out how to improve an agent's harness</a:t>
+            </a:r>
+            <a:endParaRPr lang="en-US" sz="2600" dirty="0"/>
+          </a:p>
+        </p:txBody>
+      </p:sp>
+      <p:sp>
+        <p:nvSpPr>
+          <p:cNvPr id="3" name="Shape 1"/>
+          <p:cNvSpPr/>
+          <p:nvPr/>
+        </p:nvSpPr>
+        <p:spPr>
+          <a:xfrm>
+            <a:off x="1005840" y="3703320"/>
+            <a:ext cx="2331720" cy="1097280"/>
+          </a:xfrm>
+          <a:prstGeom prst="rect">
+            <a:avLst/>
+          </a:prstGeom>
+          <a:solidFill>
+            <a:srgbClr val="FFFFFF"/>
+          </a:solidFill>
+          <a:ln w="12700">
+            <a:solidFill>
+              <a:srgbClr val="E5E5E5"/>
+            </a:solidFill>
+            <a:prstDash val="solid"/>
+          </a:ln>
+        </p:spPr>
+      </p:sp>
+      <p:sp>
+        <p:nvSpPr>
+          <p:cNvPr id="4" name="Text 2"/>
+          <p:cNvSpPr/>
+          <p:nvPr/>
+        </p:nvSpPr>
+        <p:spPr>
+          <a:xfrm>
+            <a:off x="1188720" y="3703320"/>
+            <a:ext cx="1965960" cy="1097280"/>
+          </a:xfrm>
+          <a:prstGeom prst="rect">
+            <a:avLst/>
+          </a:prstGeom>
+          <a:noFill/>
+          <a:ln/>
+        </p:spPr>
+        <p:txBody>
+          <a:bodyPr wrap="square" lIns="0" tIns="0" rIns="0" bIns="0" rtlCol="0" anchor="ctr"/>
+          <a:lstStyle/>
+          <a:p>
             <a:pPr algn="ctr" indent="0" marL="0">
               <a:buNone/>
             </a:pPr>
             <a:r>
-              <a:rPr lang="en-US" sz="2400" b="1" i="1" dirty="0">
-                <a:solidFill>
-                  <a:srgbClr val="F97316"/>
-                </a:solidFill>
-                <a:latin typeface="Arial" pitchFamily="34" charset="0"/>
-                <a:ea typeface="Arial" pitchFamily="34" charset="-122"/>
-                <a:cs typeface="Arial" pitchFamily="34" charset="-120"/>
-              </a:rPr>
-              <a:t>these</a:t>
-            </a:r>
-            <a:endParaRPr lang="en-US" sz="2400" dirty="0"/>
-          </a:p>
-        </p:txBody>
-      </p:sp>
-      <p:sp>
-        <p:nvSpPr>
-          <p:cNvPr id="13" name="Shape 11"/>
-          <p:cNvSpPr/>
-          <p:nvPr/>
-        </p:nvSpPr>
-        <p:spPr>
-          <a:xfrm>
-            <a:off x="1874520" y="4297680"/>
-            <a:ext cx="3931920" cy="2194560"/>
-          </a:xfrm>
-          <a:prstGeom prst="rect">
-            <a:avLst/>
-          </a:prstGeom>
-          <a:solidFill>
-            <a:srgbClr val="FFFFFF"/>
-          </a:solidFill>
-          <a:ln w="20320">
-            <a:solidFill>
-              <a:srgbClr val="F97316"/>
-            </a:solidFill>
-            <a:prstDash val="solid"/>
-          </a:ln>
-        </p:spPr>
-      </p:sp>
-      <p:pic>
-        <p:nvPicPr>
-          <p:cNvPr id="14" name="Image 0" descr="preencoded.png">    </p:cNvPr>
-          <p:cNvPicPr>
-            <a:picLocks noChangeAspect="1"/>
-          </p:cNvPicPr>
-          <p:nvPr/>
-        </p:nvPicPr>
-        <p:blipFill>
-          <a:blip r:embed="rId1"/>
-          <a:stretch>
-            <a:fillRect/>
-          </a:stretch>
-        </p:blipFill>
-        <p:spPr>
-          <a:xfrm>
-            <a:off x="2377440" y="4892040"/>
-            <a:ext cx="1005840" cy="1005840"/>
-          </a:xfrm>
-          <a:prstGeom prst="rect">
-            <a:avLst/>
-          </a:prstGeom>
-        </p:spPr>
-      </p:pic>
-      <p:sp>
-        <p:nvSpPr>
-          <p:cNvPr id="15" name="Text 12"/>
-          <p:cNvSpPr/>
-          <p:nvPr/>
-        </p:nvSpPr>
-        <p:spPr>
-          <a:xfrm>
-            <a:off x="3566160" y="4297680"/>
-            <a:ext cx="2057400" cy="2194560"/>
-          </a:xfrm>
-          <a:prstGeom prst="rect">
-            <a:avLst/>
-          </a:prstGeom>
-          <a:noFill/>
-          <a:ln/>
-        </p:spPr>
-        <p:txBody>
-          <a:bodyPr wrap="square" lIns="0" tIns="0" rIns="0" bIns="0" rtlCol="0" anchor="ctr"/>
-          <a:lstStyle/>
-          <a:p>
-            <a:pPr indent="0" marL="0">
-              <a:buNone/>
-            </a:pPr>
-            <a:r>
-              <a:rPr lang="en-US" sz="2600" b="1" dirty="0">
+              <a:rPr lang="en-US" sz="2000" b="1" dirty="0">
                 <a:solidFill>
                   <a:srgbClr val="0A0A0A"/>
                 </a:solidFill>
@@ -1854,22 +1501,22 @@
                 <a:ea typeface="Arial Black" pitchFamily="34" charset="-122"/>
                 <a:cs typeface="Arial Black" pitchFamily="34" charset="-120"/>
               </a:rPr>
-              <a:t>Computers</a:t>
-            </a:r>
-            <a:endParaRPr lang="en-US" sz="2600" dirty="0"/>
-          </a:p>
-        </p:txBody>
-      </p:sp>
-      <p:sp>
-        <p:nvSpPr>
-          <p:cNvPr id="16" name="Shape 13"/>
-          <p:cNvSpPr/>
-          <p:nvPr/>
-        </p:nvSpPr>
-        <p:spPr>
-          <a:xfrm>
-            <a:off x="6355080" y="4297680"/>
-            <a:ext cx="3931920" cy="2194560"/>
+              <a:t>MCP</a:t>
+            </a:r>
+            <a:endParaRPr lang="en-US" sz="2000" dirty="0"/>
+          </a:p>
+        </p:txBody>
+      </p:sp>
+      <p:sp>
+        <p:nvSpPr>
+          <p:cNvPr id="5" name="Shape 3"/>
+          <p:cNvSpPr/>
+          <p:nvPr/>
+        </p:nvSpPr>
+        <p:spPr>
+          <a:xfrm>
+            <a:off x="3611880" y="3703320"/>
+            <a:ext cx="2331720" cy="1097280"/>
           </a:xfrm>
           <a:prstGeom prst="rect">
             <a:avLst/>
@@ -1877,120 +1524,24 @@
           <a:solidFill>
             <a:srgbClr val="FFFFFF"/>
           </a:solidFill>
-          <a:ln w="20320">
+          <a:ln w="12700">
             <a:solidFill>
-              <a:srgbClr val="F97316"/>
+              <a:srgbClr val="E5E5E5"/>
             </a:solidFill>
             <a:prstDash val="solid"/>
           </a:ln>
         </p:spPr>
       </p:sp>
-      <p:pic>
-        <p:nvPicPr>
-          <p:cNvPr id="17" name="Image 1" descr="preencoded.png">    </p:cNvPr>
-          <p:cNvPicPr>
-            <a:picLocks noChangeAspect="1"/>
-          </p:cNvPicPr>
-          <p:nvPr/>
-        </p:nvPicPr>
-        <p:blipFill>
-          <a:blip r:embed="rId2"/>
-          <a:stretch>
-            <a:fillRect/>
-          </a:stretch>
-        </p:blipFill>
-        <p:spPr>
-          <a:xfrm>
-            <a:off x="6858000" y="4809744"/>
-            <a:ext cx="502920" cy="502920"/>
-          </a:xfrm>
-          <a:prstGeom prst="rect">
-            <a:avLst/>
-          </a:prstGeom>
-        </p:spPr>
-      </p:pic>
-      <p:pic>
-        <p:nvPicPr>
-          <p:cNvPr id="18" name="Image 2" descr="preencoded.png">    </p:cNvPr>
-          <p:cNvPicPr>
-            <a:picLocks noChangeAspect="1"/>
-          </p:cNvPicPr>
-          <p:nvPr/>
-        </p:nvPicPr>
-        <p:blipFill>
-          <a:blip r:embed="rId3"/>
-          <a:stretch>
-            <a:fillRect/>
-          </a:stretch>
-        </p:blipFill>
-        <p:spPr>
-          <a:xfrm>
-            <a:off x="7525512" y="4809744"/>
-            <a:ext cx="502920" cy="502920"/>
-          </a:xfrm>
-          <a:prstGeom prst="rect">
-            <a:avLst/>
-          </a:prstGeom>
-        </p:spPr>
-      </p:pic>
-      <p:pic>
-        <p:nvPicPr>
-          <p:cNvPr id="19" name="Image 3" descr="preencoded.png">    </p:cNvPr>
-          <p:cNvPicPr>
-            <a:picLocks noChangeAspect="1"/>
-          </p:cNvPicPr>
-          <p:nvPr/>
-        </p:nvPicPr>
-        <p:blipFill>
-          <a:blip r:embed="rId4"/>
-          <a:stretch>
-            <a:fillRect/>
-          </a:stretch>
-        </p:blipFill>
-        <p:spPr>
-          <a:xfrm>
-            <a:off x="6858000" y="5477256"/>
-            <a:ext cx="502920" cy="502920"/>
-          </a:xfrm>
-          <a:prstGeom prst="rect">
-            <a:avLst/>
-          </a:prstGeom>
-        </p:spPr>
-      </p:pic>
-      <p:pic>
-        <p:nvPicPr>
-          <p:cNvPr id="20" name="Image 4" descr="preencoded.png">    </p:cNvPr>
-          <p:cNvPicPr>
-            <a:picLocks noChangeAspect="1"/>
-          </p:cNvPicPr>
-          <p:nvPr/>
-        </p:nvPicPr>
-        <p:blipFill>
-          <a:blip r:embed="rId5"/>
-          <a:stretch>
-            <a:fillRect/>
-          </a:stretch>
-        </p:blipFill>
-        <p:spPr>
-          <a:xfrm>
-            <a:off x="7525512" y="5477256"/>
-            <a:ext cx="502920" cy="502920"/>
-          </a:xfrm>
-          <a:prstGeom prst="rect">
-            <a:avLst/>
-          </a:prstGeom>
-        </p:spPr>
-      </p:pic>
-      <p:sp>
-        <p:nvSpPr>
-          <p:cNvPr id="21" name="Text 14"/>
-          <p:cNvSpPr/>
-          <p:nvPr/>
-        </p:nvSpPr>
-        <p:spPr>
-          <a:xfrm>
-            <a:off x="8458200" y="4297680"/>
-            <a:ext cx="1645920" cy="2194560"/>
+      <p:sp>
+        <p:nvSpPr>
+          <p:cNvPr id="6" name="Text 4"/>
+          <p:cNvSpPr/>
+          <p:nvPr/>
+        </p:nvSpPr>
+        <p:spPr>
+          <a:xfrm>
+            <a:off x="3794760" y="3703320"/>
+            <a:ext cx="1965960" cy="1097280"/>
           </a:xfrm>
           <a:prstGeom prst="rect">
             <a:avLst/>
@@ -2002,11 +1553,11 @@
           <a:bodyPr wrap="square" lIns="0" tIns="0" rIns="0" bIns="0" rtlCol="0" anchor="ctr"/>
           <a:lstStyle/>
           <a:p>
-            <a:pPr indent="0" marL="0">
+            <a:pPr algn="ctr" indent="0" marL="0">
               <a:buNone/>
             </a:pPr>
             <a:r>
-              <a:rPr lang="en-US" sz="2200" b="1" dirty="0">
+              <a:rPr lang="en-US" sz="2000" b="1" dirty="0">
                 <a:solidFill>
                   <a:srgbClr val="0A0A0A"/>
                 </a:solidFill>
@@ -2014,9 +1565,137 @@
                 <a:ea typeface="Arial Black" pitchFamily="34" charset="-122"/>
                 <a:cs typeface="Arial Black" pitchFamily="34" charset="-120"/>
               </a:rPr>
-              <a:t>Logged-in services</a:t>
-            </a:r>
-            <a:endParaRPr lang="en-US" sz="2200" dirty="0"/>
+              <a:t>Tool calls</a:t>
+            </a:r>
+            <a:endParaRPr lang="en-US" sz="2000" dirty="0"/>
+          </a:p>
+        </p:txBody>
+      </p:sp>
+      <p:sp>
+        <p:nvSpPr>
+          <p:cNvPr id="7" name="Shape 5"/>
+          <p:cNvSpPr/>
+          <p:nvPr/>
+        </p:nvSpPr>
+        <p:spPr>
+          <a:xfrm>
+            <a:off x="6217920" y="3703320"/>
+            <a:ext cx="2331720" cy="1097280"/>
+          </a:xfrm>
+          <a:prstGeom prst="rect">
+            <a:avLst/>
+          </a:prstGeom>
+          <a:solidFill>
+            <a:srgbClr val="FFFFFF"/>
+          </a:solidFill>
+          <a:ln w="12700">
+            <a:solidFill>
+              <a:srgbClr val="E5E5E5"/>
+            </a:solidFill>
+            <a:prstDash val="solid"/>
+          </a:ln>
+        </p:spPr>
+      </p:sp>
+      <p:sp>
+        <p:nvSpPr>
+          <p:cNvPr id="8" name="Text 6"/>
+          <p:cNvSpPr/>
+          <p:nvPr/>
+        </p:nvSpPr>
+        <p:spPr>
+          <a:xfrm>
+            <a:off x="6400800" y="3703320"/>
+            <a:ext cx="1965960" cy="1097280"/>
+          </a:xfrm>
+          <a:prstGeom prst="rect">
+            <a:avLst/>
+          </a:prstGeom>
+          <a:noFill/>
+          <a:ln/>
+        </p:spPr>
+        <p:txBody>
+          <a:bodyPr wrap="square" lIns="0" tIns="0" rIns="0" bIns="0" rtlCol="0" anchor="ctr"/>
+          <a:lstStyle/>
+          <a:p>
+            <a:pPr algn="ctr" indent="0" marL="0">
+              <a:buNone/>
+            </a:pPr>
+            <a:r>
+              <a:rPr lang="en-US" sz="2000" b="1" dirty="0">
+                <a:solidFill>
+                  <a:srgbClr val="0A0A0A"/>
+                </a:solidFill>
+                <a:latin typeface="Arial Black" pitchFamily="34" charset="0"/>
+                <a:ea typeface="Arial Black" pitchFamily="34" charset="-122"/>
+                <a:cs typeface="Arial Black" pitchFamily="34" charset="-120"/>
+              </a:rPr>
+              <a:t>Virtual file systems</a:t>
+            </a:r>
+            <a:endParaRPr lang="en-US" sz="2000" dirty="0"/>
+          </a:p>
+        </p:txBody>
+      </p:sp>
+      <p:sp>
+        <p:nvSpPr>
+          <p:cNvPr id="9" name="Shape 7"/>
+          <p:cNvSpPr/>
+          <p:nvPr/>
+        </p:nvSpPr>
+        <p:spPr>
+          <a:xfrm>
+            <a:off x="8823960" y="3703320"/>
+            <a:ext cx="2331720" cy="1097280"/>
+          </a:xfrm>
+          <a:prstGeom prst="rect">
+            <a:avLst/>
+          </a:prstGeom>
+          <a:solidFill>
+            <a:srgbClr val="FFFFFF"/>
+          </a:solidFill>
+          <a:ln w="12700">
+            <a:solidFill>
+              <a:srgbClr val="E5E5E5"/>
+            </a:solidFill>
+            <a:prstDash val="solid"/>
+          </a:ln>
+        </p:spPr>
+      </p:sp>
+      <p:sp>
+        <p:nvSpPr>
+          <p:cNvPr id="10" name="Text 8"/>
+          <p:cNvSpPr/>
+          <p:nvPr/>
+        </p:nvSpPr>
+        <p:spPr>
+          <a:xfrm>
+            <a:off x="9006840" y="3703320"/>
+            <a:ext cx="1965960" cy="1097280"/>
+          </a:xfrm>
+          <a:prstGeom prst="rect">
+            <a:avLst/>
+          </a:prstGeom>
+          <a:noFill/>
+          <a:ln/>
+        </p:spPr>
+        <p:txBody>
+          <a:bodyPr wrap="square" lIns="0" tIns="0" rIns="0" bIns="0" rtlCol="0" anchor="ctr"/>
+          <a:lstStyle/>
+          <a:p>
+            <a:pPr algn="ctr" indent="0" marL="0">
+              <a:buNone/>
+            </a:pPr>
+            <a:r>
+              <a:rPr lang="en-US" sz="2000" b="1" dirty="0">
+                <a:solidFill>
+                  <a:srgbClr val="0A0A0A"/>
+                </a:solidFill>
+                <a:latin typeface="Arial Black" pitchFamily="34" charset="0"/>
+                <a:ea typeface="Arial Black" pitchFamily="34" charset="-122"/>
+                <a:cs typeface="Arial Black" pitchFamily="34" charset="-120"/>
+              </a:rPr>
+              <a:t>code-mode</a:t>
+            </a:r>
+            <a:endParaRPr lang="en-US" sz="2000" dirty="0"/>
           </a:p>
         </p:txBody>
       </p:sp>
@@ -3301,7 +2980,7 @@
                 <a:ea typeface="Arial Black" pitchFamily="34" charset="-122"/>
                 <a:cs typeface="Arial Black" pitchFamily="34" charset="-120"/>
               </a:rPr>
-              <a:t>CLIs</a:t>
+              <a:t>code-mode</a:t>
             </a:r>
             <a:endParaRPr lang="en-US" sz="1300" dirty="0"/>
           </a:p>
@@ -4221,86 +3900,14 @@
       </p:sp>
       <p:sp>
         <p:nvSpPr>
-          <p:cNvPr id="32" name="Shape 22"/>
-          <p:cNvSpPr/>
-          <p:nvPr/>
-        </p:nvSpPr>
-        <p:spPr>
-          <a:xfrm>
-            <a:off x="4183380" y="4754880"/>
-            <a:ext cx="0" cy="502920"/>
-          </a:xfrm>
-          <a:prstGeom prst="line">
-            <a:avLst/>
-          </a:prstGeom>
-          <a:noFill/>
-          <a:ln w="20320">
-            <a:solidFill>
-              <a:srgbClr val="F97316"/>
-            </a:solidFill>
-            <a:prstDash val="dash"/>
-          </a:ln>
-        </p:spPr>
-      </p:sp>
-      <p:sp>
-        <p:nvSpPr>
-          <p:cNvPr id="33" name="Shape 23"/>
-          <p:cNvSpPr/>
-          <p:nvPr/>
-        </p:nvSpPr>
-        <p:spPr>
-          <a:xfrm>
-            <a:off x="2697480" y="5257800"/>
-            <a:ext cx="1417320" cy="685800"/>
-          </a:xfrm>
-          <a:prstGeom prst="rect">
-            <a:avLst/>
-          </a:prstGeom>
-          <a:solidFill>
-            <a:srgbClr val="FFFFFF"/>
-          </a:solidFill>
-          <a:ln w="15875">
-            <a:solidFill>
-              <a:srgbClr val="F97316"/>
-            </a:solidFill>
-            <a:prstDash val="solid"/>
-          </a:ln>
-        </p:spPr>
-      </p:sp>
-      <p:pic>
-        <p:nvPicPr>
-          <p:cNvPr id="34" name="Image 8" descr="preencoded.png">    </p:cNvPr>
-          <p:cNvPicPr>
-            <a:picLocks noChangeAspect="1"/>
-          </p:cNvPicPr>
-          <p:nvPr/>
-        </p:nvPicPr>
-        <p:blipFill>
-          <a:blip r:embed="rId9"/>
-          <a:stretch>
-            <a:fillRect/>
-          </a:stretch>
-        </p:blipFill>
-        <p:spPr>
-          <a:xfrm>
-            <a:off x="2843784" y="5463540"/>
-            <a:ext cx="274320" cy="274320"/>
-          </a:xfrm>
-          <a:prstGeom prst="rect">
-            <a:avLst/>
-          </a:prstGeom>
-        </p:spPr>
-      </p:pic>
-      <p:sp>
-        <p:nvSpPr>
-          <p:cNvPr id="35" name="Text 24"/>
-          <p:cNvSpPr/>
-          <p:nvPr/>
-        </p:nvSpPr>
-        <p:spPr>
-          <a:xfrm>
-            <a:off x="3200400" y="5257800"/>
-            <a:ext cx="822960" cy="685800"/>
+          <p:cNvPr id="32" name="Text 22"/>
+          <p:cNvSpPr/>
+          <p:nvPr/>
+        </p:nvSpPr>
+        <p:spPr>
+          <a:xfrm>
+            <a:off x="640080" y="5532120"/>
+            <a:ext cx="10881360" cy="640080"/>
           </a:xfrm>
           <a:prstGeom prst="rect">
             <a:avLst/>
@@ -4312,285 +3919,21 @@
           <a:bodyPr wrap="square" lIns="0" tIns="0" rIns="0" bIns="0" rtlCol="0" anchor="ctr"/>
           <a:lstStyle/>
           <a:p>
-            <a:pPr indent="0" marL="0">
+            <a:pPr algn="ctr" indent="0" marL="0">
               <a:buNone/>
             </a:pPr>
             <a:r>
-              <a:rPr lang="en-US" sz="1300" b="1" dirty="0">
+              <a:rPr lang="en-US" sz="2600" i="1" dirty="0">
                 <a:solidFill>
                   <a:srgbClr val="0A0A0A"/>
                 </a:solidFill>
-                <a:latin typeface="Arial Black" pitchFamily="34" charset="0"/>
-                <a:ea typeface="Arial Black" pitchFamily="34" charset="-122"/>
-                <a:cs typeface="Arial Black" pitchFamily="34" charset="-120"/>
+                <a:latin typeface="Arial" pitchFamily="34" charset="0"/>
+                <a:ea typeface="Arial" pitchFamily="34" charset="-122"/>
+                <a:cs typeface="Arial" pitchFamily="34" charset="-120"/>
               </a:rPr>
-              <a:t>MCP</a:t>
-            </a:r>
-            <a:endParaRPr lang="en-US" sz="1300" dirty="0"/>
-          </a:p>
-        </p:txBody>
-      </p:sp>
-      <p:sp>
-        <p:nvSpPr>
-          <p:cNvPr id="36" name="Shape 25"/>
-          <p:cNvSpPr/>
-          <p:nvPr/>
-        </p:nvSpPr>
-        <p:spPr>
-          <a:xfrm>
-            <a:off x="4251960" y="5257800"/>
-            <a:ext cx="1417320" cy="685800"/>
-          </a:xfrm>
-          <a:prstGeom prst="rect">
-            <a:avLst/>
-          </a:prstGeom>
-          <a:solidFill>
-            <a:srgbClr val="FFFFFF"/>
-          </a:solidFill>
-          <a:ln w="15875">
-            <a:solidFill>
-              <a:srgbClr val="F97316"/>
-            </a:solidFill>
-            <a:prstDash val="solid"/>
-          </a:ln>
-        </p:spPr>
-      </p:sp>
-      <p:pic>
-        <p:nvPicPr>
-          <p:cNvPr id="37" name="Image 9" descr="preencoded.png">    </p:cNvPr>
-          <p:cNvPicPr>
-            <a:picLocks noChangeAspect="1"/>
-          </p:cNvPicPr>
-          <p:nvPr/>
-        </p:nvPicPr>
-        <p:blipFill>
-          <a:blip r:embed="rId10"/>
-          <a:stretch>
-            <a:fillRect/>
-          </a:stretch>
-        </p:blipFill>
-        <p:spPr>
-          <a:xfrm>
-            <a:off x="4398264" y="5463540"/>
-            <a:ext cx="274320" cy="274320"/>
-          </a:xfrm>
-          <a:prstGeom prst="rect">
-            <a:avLst/>
-          </a:prstGeom>
-        </p:spPr>
-      </p:pic>
-      <p:sp>
-        <p:nvSpPr>
-          <p:cNvPr id="38" name="Text 26"/>
-          <p:cNvSpPr/>
-          <p:nvPr/>
-        </p:nvSpPr>
-        <p:spPr>
-          <a:xfrm>
-            <a:off x="4754880" y="5257800"/>
-            <a:ext cx="822960" cy="685800"/>
-          </a:xfrm>
-          <a:prstGeom prst="rect">
-            <a:avLst/>
-          </a:prstGeom>
-          <a:noFill/>
-          <a:ln/>
-        </p:spPr>
-        <p:txBody>
-          <a:bodyPr wrap="square" lIns="0" tIns="0" rIns="0" bIns="0" rtlCol="0" anchor="ctr"/>
-          <a:lstStyle/>
-          <a:p>
-            <a:pPr indent="0" marL="0">
-              <a:buNone/>
-            </a:pPr>
-            <a:r>
-              <a:rPr lang="en-US" sz="1300" b="1" dirty="0">
-                <a:solidFill>
-                  <a:srgbClr val="0A0A0A"/>
-                </a:solidFill>
-                <a:latin typeface="Arial Black" pitchFamily="34" charset="0"/>
-                <a:ea typeface="Arial Black" pitchFamily="34" charset="-122"/>
-                <a:cs typeface="Arial Black" pitchFamily="34" charset="-120"/>
-              </a:rPr>
-              <a:t>Tool calls</a:t>
-            </a:r>
-            <a:endParaRPr lang="en-US" sz="1300" dirty="0"/>
-          </a:p>
-        </p:txBody>
-      </p:sp>
-      <p:sp>
-        <p:nvSpPr>
-          <p:cNvPr id="39" name="Shape 27"/>
-          <p:cNvSpPr/>
-          <p:nvPr/>
-        </p:nvSpPr>
-        <p:spPr>
-          <a:xfrm>
-            <a:off x="2697480" y="6080760"/>
-            <a:ext cx="1417320" cy="685800"/>
-          </a:xfrm>
-          <a:prstGeom prst="rect">
-            <a:avLst/>
-          </a:prstGeom>
-          <a:solidFill>
-            <a:srgbClr val="FFFFFF"/>
-          </a:solidFill>
-          <a:ln w="15875">
-            <a:solidFill>
-              <a:srgbClr val="F97316"/>
-            </a:solidFill>
-            <a:prstDash val="solid"/>
-          </a:ln>
-        </p:spPr>
-      </p:sp>
-      <p:pic>
-        <p:nvPicPr>
-          <p:cNvPr id="40" name="Image 10" descr="preencoded.png">    </p:cNvPr>
-          <p:cNvPicPr>
-            <a:picLocks noChangeAspect="1"/>
-          </p:cNvPicPr>
-          <p:nvPr/>
-        </p:nvPicPr>
-        <p:blipFill>
-          <a:blip r:embed="rId11"/>
-          <a:stretch>
-            <a:fillRect/>
-          </a:stretch>
-        </p:blipFill>
-        <p:spPr>
-          <a:xfrm>
-            <a:off x="2843784" y="6286500"/>
-            <a:ext cx="274320" cy="274320"/>
-          </a:xfrm>
-          <a:prstGeom prst="rect">
-            <a:avLst/>
-          </a:prstGeom>
-        </p:spPr>
-      </p:pic>
-      <p:sp>
-        <p:nvSpPr>
-          <p:cNvPr id="41" name="Text 28"/>
-          <p:cNvSpPr/>
-          <p:nvPr/>
-        </p:nvSpPr>
-        <p:spPr>
-          <a:xfrm>
-            <a:off x="3200400" y="6080760"/>
-            <a:ext cx="822960" cy="685800"/>
-          </a:xfrm>
-          <a:prstGeom prst="rect">
-            <a:avLst/>
-          </a:prstGeom>
-          <a:noFill/>
-          <a:ln/>
-        </p:spPr>
-        <p:txBody>
-          <a:bodyPr wrap="square" lIns="0" tIns="0" rIns="0" bIns="0" rtlCol="0" anchor="ctr"/>
-          <a:lstStyle/>
-          <a:p>
-            <a:pPr indent="0" marL="0">
-              <a:buNone/>
-            </a:pPr>
-            <a:r>
-              <a:rPr lang="en-US" sz="1300" b="1" dirty="0">
-                <a:solidFill>
-                  <a:srgbClr val="0A0A0A"/>
-                </a:solidFill>
-                <a:latin typeface="Arial Black" pitchFamily="34" charset="0"/>
-                <a:ea typeface="Arial Black" pitchFamily="34" charset="-122"/>
-                <a:cs typeface="Arial Black" pitchFamily="34" charset="-120"/>
-              </a:rPr>
-              <a:t>Virtual FS</a:t>
-            </a:r>
-            <a:endParaRPr lang="en-US" sz="1300" dirty="0"/>
-          </a:p>
-        </p:txBody>
-      </p:sp>
-      <p:sp>
-        <p:nvSpPr>
-          <p:cNvPr id="42" name="Shape 29"/>
-          <p:cNvSpPr/>
-          <p:nvPr/>
-        </p:nvSpPr>
-        <p:spPr>
-          <a:xfrm>
-            <a:off x="4251960" y="6080760"/>
-            <a:ext cx="1417320" cy="685800"/>
-          </a:xfrm>
-          <a:prstGeom prst="rect">
-            <a:avLst/>
-          </a:prstGeom>
-          <a:solidFill>
-            <a:srgbClr val="FFFFFF"/>
-          </a:solidFill>
-          <a:ln w="15875">
-            <a:solidFill>
-              <a:srgbClr val="F97316"/>
-            </a:solidFill>
-            <a:prstDash val="solid"/>
-          </a:ln>
-        </p:spPr>
-      </p:sp>
-      <p:pic>
-        <p:nvPicPr>
-          <p:cNvPr id="43" name="Image 11" descr="preencoded.png">    </p:cNvPr>
-          <p:cNvPicPr>
-            <a:picLocks noChangeAspect="1"/>
-          </p:cNvPicPr>
-          <p:nvPr/>
-        </p:nvPicPr>
-        <p:blipFill>
-          <a:blip r:embed="rId12"/>
-          <a:stretch>
-            <a:fillRect/>
-          </a:stretch>
-        </p:blipFill>
-        <p:spPr>
-          <a:xfrm>
-            <a:off x="4398264" y="6286500"/>
-            <a:ext cx="274320" cy="274320"/>
-          </a:xfrm>
-          <a:prstGeom prst="rect">
-            <a:avLst/>
-          </a:prstGeom>
-        </p:spPr>
-      </p:pic>
-      <p:sp>
-        <p:nvSpPr>
-          <p:cNvPr id="44" name="Text 30"/>
-          <p:cNvSpPr/>
-          <p:nvPr/>
-        </p:nvSpPr>
-        <p:spPr>
-          <a:xfrm>
-            <a:off x="4754880" y="6080760"/>
-            <a:ext cx="822960" cy="685800"/>
-          </a:xfrm>
-          <a:prstGeom prst="rect">
-            <a:avLst/>
-          </a:prstGeom>
-          <a:noFill/>
-          <a:ln/>
-        </p:spPr>
-        <p:txBody>
-          <a:bodyPr wrap="square" lIns="0" tIns="0" rIns="0" bIns="0" rtlCol="0" anchor="ctr"/>
-          <a:lstStyle/>
-          <a:p>
-            <a:pPr indent="0" marL="0">
-              <a:buNone/>
-            </a:pPr>
-            <a:r>
-              <a:rPr lang="en-US" sz="1300" b="1" dirty="0">
-                <a:solidFill>
-                  <a:srgbClr val="0A0A0A"/>
-                </a:solidFill>
-                <a:latin typeface="Arial Black" pitchFamily="34" charset="0"/>
-                <a:ea typeface="Arial Black" pitchFamily="34" charset="-122"/>
-                <a:cs typeface="Arial Black" pitchFamily="34" charset="-120"/>
-              </a:rPr>
-              <a:t>CLIs</a:t>
-            </a:r>
-            <a:endParaRPr lang="en-US" sz="1300" dirty="0"/>
+              <a:t>what if we made tooling here instead?</a:t>
+            </a:r>
+            <a:endParaRPr lang="en-US" sz="2600" dirty="0"/>
           </a:p>
         </p:txBody>
       </p:sp>
